--- a/lectures/CYBER444_Week09_CIS_STIG_and_Compliance.pptx
+++ b/lectures/CYBER444_Week09_CIS_STIG_and_Compliance.pptx
@@ -63,6 +63,9 @@
     <p:sldId id="302" r:id="rId53"/>
     <p:sldId id="303" r:id="rId54"/>
     <p:sldId id="304" r:id="rId55"/>
+    <p:sldId id="342" r:id="rId19"/>
+    <p:sldId id="343" r:id="rId2"/>
+    <p:sldId id="344" r:id="rId67"/>
   </p:sldIdLst>
   <p:notesMasterIdLst>
     <p:notesMasterId r:id="rId46"/>
@@ -49677,6 +49680,798 @@
 </p:sld>
 </file>
 
+<file path=ppt/slides/slide59.xml><?xml version="1.0" encoding="utf-8"?>
+<p:sld xmlns:a="http://schemas.openxmlformats.org/drawingml/2006/main" xmlns:p="http://schemas.openxmlformats.org/presentationml/2006/main" xmlns:r="http://schemas.openxmlformats.org/officeDocument/2006/relationships">
+  <p:cSld>
+    <p:spTree>
+      <p:nvGrpSpPr>
+        <p:cNvPr id="1" name=""/>
+        <p:cNvGrpSpPr/>
+        <p:nvPr/>
+      </p:nvGrpSpPr>
+      <p:grpSpPr/>
+      <p:sp>
+        <p:nvSpPr>
+          <p:cNvPr id="2" name="TextBox 1"/>
+          <p:cNvSpPr txBox="1"/>
+          <p:nvPr/>
+        </p:nvSpPr>
+        <p:spPr>
+          <a:xfrm>
+            <a:off x="502920" y="320040"/>
+            <a:ext cx="8046720" cy="210312"/>
+          </a:xfrm>
+          <a:prstGeom prst="rect">
+            <a:avLst/>
+          </a:prstGeom>
+          <a:noFill/>
+        </p:spPr>
+        <p:txBody>
+          <a:bodyPr wrap="square" lIns="54864" rIns="54864" tIns="18288" bIns="18288">
+            <a:spAutoFit/>
+          </a:bodyPr>
+          <a:lstStyle/>
+          <a:p>
+            <a:pPr algn="l"/>
+            <a:r>
+              <a:rPr sz="1100" b="1">
+                <a:solidFill>
+                  <a:srgbClr val="49B1C7"/>
+                </a:solidFill>
+                <a:latin typeface="Aptos"/>
+              </a:rPr>
+              <a:t>VENDOR PITCH SHOWDOWN</a:t>
+            </a:r>
+          </a:p>
+        </p:txBody>
+      </p:sp>
+      <p:sp>
+        <p:nvSpPr>
+          <p:cNvPr id="3" name="TextBox 2"/>
+          <p:cNvSpPr txBox="1"/>
+          <p:nvPr/>
+        </p:nvSpPr>
+        <p:spPr>
+          <a:xfrm>
+            <a:off x="502920" y="566928"/>
+            <a:ext cx="10972800" cy="548640"/>
+          </a:xfrm>
+          <a:prstGeom prst="rect">
+            <a:avLst/>
+          </a:prstGeom>
+          <a:noFill/>
+        </p:spPr>
+        <p:txBody>
+          <a:bodyPr wrap="square" lIns="54864" rIns="54864" tIns="18288" bIns="18288">
+            <a:spAutoFit/>
+          </a:bodyPr>
+          <a:lstStyle/>
+          <a:p>
+            <a:pPr algn="l"/>
+            <a:r>
+              <a:rPr sz="2700" b="1">
+                <a:solidFill>
+                  <a:srgbClr val="275185"/>
+                </a:solidFill>
+                <a:latin typeface="Aptos"/>
+              </a:rPr>
+              <a:t>Choose a file service for a campus team</a:t>
+            </a:r>
+          </a:p>
+        </p:txBody>
+      </p:sp>
+      <p:sp>
+        <p:nvSpPr>
+          <p:cNvPr id="4" name="TextBox 3"/>
+          <p:cNvSpPr txBox="1"/>
+          <p:nvPr/>
+        </p:nvSpPr>
+        <p:spPr>
+          <a:xfrm>
+            <a:off x="530352" y="1133856"/>
+            <a:ext cx="10698480" cy="356616"/>
+          </a:xfrm>
+          <a:prstGeom prst="rect">
+            <a:avLst/>
+          </a:prstGeom>
+          <a:noFill/>
+        </p:spPr>
+        <p:txBody>
+          <a:bodyPr wrap="square" lIns="54864" rIns="54864" tIns="18288" bIns="18288">
+            <a:spAutoFit/>
+          </a:bodyPr>
+          <a:lstStyle/>
+          <a:p>
+            <a:pPr algn="l"/>
+            <a:r>
+              <a:rPr sz="1400" b="0">
+                <a:solidFill>
+                  <a:srgbClr val="647891"/>
+                </a:solidFill>
+                <a:latin typeface="Aptos"/>
+              </a:rPr>
+              <a:t>The service will store student and employee files. All vendors and offer details below are fictional.</a:t>
+            </a:r>
+          </a:p>
+        </p:txBody>
+      </p:sp>
+      <p:sp>
+        <p:nvSpPr>
+          <p:cNvPr id="5" name="Rounded Rectangle 4"/>
+          <p:cNvSpPr/>
+          <p:nvPr/>
+        </p:nvSpPr>
+        <p:spPr>
+          <a:xfrm>
+            <a:off x="640080" y="1975104"/>
+            <a:ext cx="3517391" cy="2468880"/>
+          </a:xfrm>
+          <a:prstGeom prst="roundRect">
+            <a:avLst/>
+          </a:prstGeom>
+          <a:solidFill>
+            <a:srgbClr val="FFFFFF"/>
+          </a:solidFill>
+          <a:ln w="12700">
+            <a:solidFill>
+              <a:srgbClr val="C9D5E2"/>
+            </a:solidFill>
+          </a:ln>
+        </p:spPr>
+        <p:style>
+          <a:lnRef idx="1">
+            <a:schemeClr val="accent1"/>
+          </a:lnRef>
+          <a:fillRef idx="3">
+            <a:schemeClr val="accent1"/>
+          </a:fillRef>
+          <a:effectRef idx="2">
+            <a:schemeClr val="accent1"/>
+          </a:effectRef>
+          <a:fontRef idx="minor">
+            <a:schemeClr val="lt1"/>
+          </a:fontRef>
+        </p:style>
+        <p:txBody>
+          <a:bodyPr rtlCol="0" anchor="ctr"/>
+          <a:lstStyle/>
+          <a:p>
+            <a:pPr algn="ctr"/>
+          </a:p>
+        </p:txBody>
+      </p:sp>
+      <p:sp>
+        <p:nvSpPr>
+          <p:cNvPr id="6" name="Rounded Rectangle 5"/>
+          <p:cNvSpPr/>
+          <p:nvPr/>
+        </p:nvSpPr>
+        <p:spPr>
+          <a:xfrm>
+            <a:off x="640080" y="1975104"/>
+            <a:ext cx="3517391" cy="347472"/>
+          </a:xfrm>
+          <a:prstGeom prst="roundRect">
+            <a:avLst/>
+          </a:prstGeom>
+          <a:solidFill>
+            <a:srgbClr val="49B1C7"/>
+          </a:solidFill>
+          <a:ln>
+            <a:solidFill>
+              <a:srgbClr val="49B1C7"/>
+            </a:solidFill>
+          </a:ln>
+        </p:spPr>
+        <p:style>
+          <a:lnRef idx="1">
+            <a:schemeClr val="accent1"/>
+          </a:lnRef>
+          <a:fillRef idx="3">
+            <a:schemeClr val="accent1"/>
+          </a:fillRef>
+          <a:effectRef idx="2">
+            <a:schemeClr val="accent1"/>
+          </a:effectRef>
+          <a:fontRef idx="minor">
+            <a:schemeClr val="lt1"/>
+          </a:fontRef>
+        </p:style>
+        <p:txBody>
+          <a:bodyPr rtlCol="0" anchor="ctr"/>
+          <a:lstStyle/>
+          <a:p>
+            <a:pPr algn="ctr"/>
+          </a:p>
+        </p:txBody>
+      </p:sp>
+      <p:sp>
+        <p:nvSpPr>
+          <p:cNvPr id="7" name="TextBox 6"/>
+          <p:cNvSpPr txBox="1"/>
+          <p:nvPr/>
+        </p:nvSpPr>
+        <p:spPr>
+          <a:xfrm>
+            <a:off x="713231" y="2020824"/>
+            <a:ext cx="3371087" cy="246888"/>
+          </a:xfrm>
+          <a:prstGeom prst="rect">
+            <a:avLst/>
+          </a:prstGeom>
+          <a:noFill/>
+        </p:spPr>
+        <p:txBody>
+          <a:bodyPr wrap="square" lIns="54864" rIns="54864" tIns="18288" bIns="18288">
+            <a:spAutoFit/>
+          </a:bodyPr>
+          <a:lstStyle/>
+          <a:p>
+            <a:pPr algn="ctr"/>
+            <a:r>
+              <a:rPr sz="1300" b="1">
+                <a:solidFill>
+                  <a:srgbClr val="FFFFFF"/>
+                </a:solidFill>
+                <a:latin typeface="Aptos"/>
+              </a:rPr>
+              <a:t>NORTHSTAR FILES</a:t>
+            </a:r>
+          </a:p>
+        </p:txBody>
+      </p:sp>
+      <p:sp>
+        <p:nvSpPr>
+          <p:cNvPr id="8" name="TextBox 7"/>
+          <p:cNvSpPr txBox="1"/>
+          <p:nvPr/>
+        </p:nvSpPr>
+        <p:spPr>
+          <a:xfrm>
+            <a:off x="804671" y="2496312"/>
+            <a:ext cx="3188207" cy="1810512"/>
+          </a:xfrm>
+          <a:prstGeom prst="rect">
+            <a:avLst/>
+          </a:prstGeom>
+          <a:noFill/>
+        </p:spPr>
+        <p:txBody>
+          <a:bodyPr wrap="square" lIns="54864" rIns="54864" tIns="18288" bIns="18288">
+            <a:spAutoFit/>
+          </a:bodyPr>
+          <a:lstStyle/>
+          <a:p>
+            <a:pPr algn="ctr"/>
+            <a:r>
+              <a:rPr sz="1400" b="0">
+                <a:solidFill>
+                  <a:srgbClr val="253446"/>
+                </a:solidFill>
+                <a:latin typeface="Aptos"/>
+              </a:rPr>
+              <a:t>24% over budget. SSO and mandatory MFA for admins. 180-day admin logs. Named subprocessors; export and deletion included. 24-hour recovery target. Independent report is 18 months old.</a:t>
+            </a:r>
+          </a:p>
+        </p:txBody>
+      </p:sp>
+      <p:sp>
+        <p:nvSpPr>
+          <p:cNvPr id="9" name="Rounded Rectangle 8"/>
+          <p:cNvSpPr/>
+          <p:nvPr/>
+        </p:nvSpPr>
+        <p:spPr>
+          <a:xfrm>
+            <a:off x="4367784" y="1975104"/>
+            <a:ext cx="3517391" cy="2468880"/>
+          </a:xfrm>
+          <a:prstGeom prst="roundRect">
+            <a:avLst/>
+          </a:prstGeom>
+          <a:solidFill>
+            <a:srgbClr val="FFFFFF"/>
+          </a:solidFill>
+          <a:ln w="12700">
+            <a:solidFill>
+              <a:srgbClr val="C9D5E2"/>
+            </a:solidFill>
+          </a:ln>
+        </p:spPr>
+        <p:style>
+          <a:lnRef idx="1">
+            <a:schemeClr val="accent1"/>
+          </a:lnRef>
+          <a:fillRef idx="3">
+            <a:schemeClr val="accent1"/>
+          </a:fillRef>
+          <a:effectRef idx="2">
+            <a:schemeClr val="accent1"/>
+          </a:effectRef>
+          <a:fontRef idx="minor">
+            <a:schemeClr val="lt1"/>
+          </a:fontRef>
+        </p:style>
+        <p:txBody>
+          <a:bodyPr rtlCol="0" anchor="ctr"/>
+          <a:lstStyle/>
+          <a:p>
+            <a:pPr algn="ctr"/>
+          </a:p>
+        </p:txBody>
+      </p:sp>
+      <p:sp>
+        <p:nvSpPr>
+          <p:cNvPr id="10" name="Rounded Rectangle 9"/>
+          <p:cNvSpPr/>
+          <p:nvPr/>
+        </p:nvSpPr>
+        <p:spPr>
+          <a:xfrm>
+            <a:off x="4367784" y="1975104"/>
+            <a:ext cx="3517391" cy="347472"/>
+          </a:xfrm>
+          <a:prstGeom prst="roundRect">
+            <a:avLst/>
+          </a:prstGeom>
+          <a:solidFill>
+            <a:srgbClr val="4D83BF"/>
+          </a:solidFill>
+          <a:ln>
+            <a:solidFill>
+              <a:srgbClr val="4D83BF"/>
+            </a:solidFill>
+          </a:ln>
+        </p:spPr>
+        <p:style>
+          <a:lnRef idx="1">
+            <a:schemeClr val="accent1"/>
+          </a:lnRef>
+          <a:fillRef idx="3">
+            <a:schemeClr val="accent1"/>
+          </a:fillRef>
+          <a:effectRef idx="2">
+            <a:schemeClr val="accent1"/>
+          </a:effectRef>
+          <a:fontRef idx="minor">
+            <a:schemeClr val="lt1"/>
+          </a:fontRef>
+        </p:style>
+        <p:txBody>
+          <a:bodyPr rtlCol="0" anchor="ctr"/>
+          <a:lstStyle/>
+          <a:p>
+            <a:pPr algn="ctr"/>
+          </a:p>
+        </p:txBody>
+      </p:sp>
+      <p:sp>
+        <p:nvSpPr>
+          <p:cNvPr id="11" name="TextBox 10"/>
+          <p:cNvSpPr txBox="1"/>
+          <p:nvPr/>
+        </p:nvSpPr>
+        <p:spPr>
+          <a:xfrm>
+            <a:off x="4440936" y="2020824"/>
+            <a:ext cx="3371087" cy="246888"/>
+          </a:xfrm>
+          <a:prstGeom prst="rect">
+            <a:avLst/>
+          </a:prstGeom>
+          <a:noFill/>
+        </p:spPr>
+        <p:txBody>
+          <a:bodyPr wrap="square" lIns="54864" rIns="54864" tIns="18288" bIns="18288">
+            <a:spAutoFit/>
+          </a:bodyPr>
+          <a:lstStyle/>
+          <a:p>
+            <a:pPr algn="ctr"/>
+            <a:r>
+              <a:rPr sz="1300" b="1">
+                <a:solidFill>
+                  <a:srgbClr val="FFFFFF"/>
+                </a:solidFill>
+                <a:latin typeface="Aptos"/>
+              </a:rPr>
+              <a:t>QUICKNEST</a:t>
+            </a:r>
+          </a:p>
+        </p:txBody>
+      </p:sp>
+      <p:sp>
+        <p:nvSpPr>
+          <p:cNvPr id="12" name="TextBox 11"/>
+          <p:cNvSpPr txBox="1"/>
+          <p:nvPr/>
+        </p:nvSpPr>
+        <p:spPr>
+          <a:xfrm>
+            <a:off x="4532375" y="2496312"/>
+            <a:ext cx="3188207" cy="1810512"/>
+          </a:xfrm>
+          <a:prstGeom prst="rect">
+            <a:avLst/>
+          </a:prstGeom>
+          <a:noFill/>
+        </p:spPr>
+        <p:txBody>
+          <a:bodyPr wrap="square" lIns="54864" rIns="54864" tIns="18288" bIns="18288">
+            <a:spAutoFit/>
+          </a:bodyPr>
+          <a:lstStyle/>
+          <a:p>
+            <a:pPr algn="ctr"/>
+            <a:r>
+              <a:rPr sz="1400" b="0">
+                <a:solidFill>
+                  <a:srgbClr val="253446"/>
+                </a:solidFill>
+                <a:latin typeface="Aptos"/>
+              </a:rPr>
+              <a:t>Within budget. SSO supported; admin MFA optional. 30-day admin logs. Daily backups; 48-hour recovery target. Subprocessors shared on request. “Compliance ready” claim; no scoped evidence supplied.</a:t>
+            </a:r>
+          </a:p>
+        </p:txBody>
+      </p:sp>
+      <p:sp>
+        <p:nvSpPr>
+          <p:cNvPr id="13" name="Rounded Rectangle 12"/>
+          <p:cNvSpPr/>
+          <p:nvPr/>
+        </p:nvSpPr>
+        <p:spPr>
+          <a:xfrm>
+            <a:off x="8095487" y="1975104"/>
+            <a:ext cx="3517391" cy="2468880"/>
+          </a:xfrm>
+          <a:prstGeom prst="roundRect">
+            <a:avLst/>
+          </a:prstGeom>
+          <a:solidFill>
+            <a:srgbClr val="FFFFFF"/>
+          </a:solidFill>
+          <a:ln w="12700">
+            <a:solidFill>
+              <a:srgbClr val="C9D5E2"/>
+            </a:solidFill>
+          </a:ln>
+        </p:spPr>
+        <p:style>
+          <a:lnRef idx="1">
+            <a:schemeClr val="accent1"/>
+          </a:lnRef>
+          <a:fillRef idx="3">
+            <a:schemeClr val="accent1"/>
+          </a:fillRef>
+          <a:effectRef idx="2">
+            <a:schemeClr val="accent1"/>
+          </a:effectRef>
+          <a:fontRef idx="minor">
+            <a:schemeClr val="lt1"/>
+          </a:fontRef>
+        </p:style>
+        <p:txBody>
+          <a:bodyPr rtlCol="0" anchor="ctr"/>
+          <a:lstStyle/>
+          <a:p>
+            <a:pPr algn="ctr"/>
+          </a:p>
+        </p:txBody>
+      </p:sp>
+      <p:sp>
+        <p:nvSpPr>
+          <p:cNvPr id="14" name="Rounded Rectangle 13"/>
+          <p:cNvSpPr/>
+          <p:nvPr/>
+        </p:nvSpPr>
+        <p:spPr>
+          <a:xfrm>
+            <a:off x="8095487" y="1975104"/>
+            <a:ext cx="3517391" cy="347472"/>
+          </a:xfrm>
+          <a:prstGeom prst="roundRect">
+            <a:avLst/>
+          </a:prstGeom>
+          <a:solidFill>
+            <a:srgbClr val="F79441"/>
+          </a:solidFill>
+          <a:ln>
+            <a:solidFill>
+              <a:srgbClr val="F79441"/>
+            </a:solidFill>
+          </a:ln>
+        </p:spPr>
+        <p:style>
+          <a:lnRef idx="1">
+            <a:schemeClr val="accent1"/>
+          </a:lnRef>
+          <a:fillRef idx="3">
+            <a:schemeClr val="accent1"/>
+          </a:fillRef>
+          <a:effectRef idx="2">
+            <a:schemeClr val="accent1"/>
+          </a:effectRef>
+          <a:fontRef idx="minor">
+            <a:schemeClr val="lt1"/>
+          </a:fontRef>
+        </p:style>
+        <p:txBody>
+          <a:bodyPr rtlCol="0" anchor="ctr"/>
+          <a:lstStyle/>
+          <a:p>
+            <a:pPr algn="ctr"/>
+          </a:p>
+        </p:txBody>
+      </p:sp>
+      <p:sp>
+        <p:nvSpPr>
+          <p:cNvPr id="15" name="TextBox 14"/>
+          <p:cNvSpPr txBox="1"/>
+          <p:nvPr/>
+        </p:nvSpPr>
+        <p:spPr>
+          <a:xfrm>
+            <a:off x="8168639" y="2020824"/>
+            <a:ext cx="3371087" cy="246888"/>
+          </a:xfrm>
+          <a:prstGeom prst="rect">
+            <a:avLst/>
+          </a:prstGeom>
+          <a:noFill/>
+        </p:spPr>
+        <p:txBody>
+          <a:bodyPr wrap="square" lIns="54864" rIns="54864" tIns="18288" bIns="18288">
+            <a:spAutoFit/>
+          </a:bodyPr>
+          <a:lstStyle/>
+          <a:p>
+            <a:pPr algn="ctr"/>
+            <a:r>
+              <a:rPr sz="1300" b="1">
+                <a:solidFill>
+                  <a:srgbClr val="FFFFFF"/>
+                </a:solidFill>
+                <a:latin typeface="Aptos"/>
+              </a:rPr>
+              <a:t>BUYING PANEL</a:t>
+            </a:r>
+          </a:p>
+        </p:txBody>
+      </p:sp>
+      <p:sp>
+        <p:nvSpPr>
+          <p:cNvPr id="16" name="TextBox 15"/>
+          <p:cNvSpPr txBox="1"/>
+          <p:nvPr/>
+        </p:nvSpPr>
+        <p:spPr>
+          <a:xfrm>
+            <a:off x="8260079" y="2496312"/>
+            <a:ext cx="3188207" cy="1810512"/>
+          </a:xfrm>
+          <a:prstGeom prst="rect">
+            <a:avLst/>
+          </a:prstGeom>
+          <a:noFill/>
+        </p:spPr>
+        <p:txBody>
+          <a:bodyPr wrap="square" lIns="54864" rIns="54864" tIns="18288" bIns="18288">
+            <a:spAutoFit/>
+          </a:bodyPr>
+          <a:lstStyle/>
+          <a:p>
+            <a:pPr algn="ctr"/>
+            <a:r>
+              <a:rPr sz="1400" b="0">
+                <a:solidFill>
+                  <a:srgbClr val="253446"/>
+                </a:solidFill>
+                <a:latin typeface="Aptos"/>
+              </a:rPr>
+              <a:t>Choose, conditionally approve, or defer. Ask three follow-up questions. Require two contract safeguards. Name evidence to verify before launch. Who confirms which requirements apply?</a:t>
+            </a:r>
+          </a:p>
+        </p:txBody>
+      </p:sp>
+      <p:sp>
+        <p:nvSpPr>
+          <p:cNvPr id="17" name="Rounded Rectangle 16"/>
+          <p:cNvSpPr/>
+          <p:nvPr/>
+        </p:nvSpPr>
+        <p:spPr>
+          <a:xfrm>
+            <a:off x="841248" y="5010912"/>
+            <a:ext cx="10515600" cy="603504"/>
+          </a:xfrm>
+          <a:prstGeom prst="roundRect">
+            <a:avLst/>
+          </a:prstGeom>
+          <a:solidFill>
+            <a:srgbClr val="FFFFFF"/>
+          </a:solidFill>
+          <a:ln w="13970">
+            <a:solidFill>
+              <a:srgbClr val="275185"/>
+            </a:solidFill>
+          </a:ln>
+        </p:spPr>
+        <p:style>
+          <a:lnRef idx="1">
+            <a:schemeClr val="accent1"/>
+          </a:lnRef>
+          <a:fillRef idx="3">
+            <a:schemeClr val="accent1"/>
+          </a:fillRef>
+          <a:effectRef idx="2">
+            <a:schemeClr val="accent1"/>
+          </a:effectRef>
+          <a:fontRef idx="minor">
+            <a:schemeClr val="lt1"/>
+          </a:fontRef>
+        </p:style>
+        <p:txBody>
+          <a:bodyPr rtlCol="0" anchor="ctr"/>
+          <a:lstStyle/>
+          <a:p>
+            <a:pPr algn="ctr"/>
+          </a:p>
+        </p:txBody>
+      </p:sp>
+      <p:sp>
+        <p:nvSpPr>
+          <p:cNvPr id="18" name="Rectangle 17"/>
+          <p:cNvSpPr/>
+          <p:nvPr/>
+        </p:nvSpPr>
+        <p:spPr>
+          <a:xfrm>
+            <a:off x="841248" y="5010912"/>
+            <a:ext cx="100584" cy="603504"/>
+          </a:xfrm>
+          <a:prstGeom prst="rect">
+            <a:avLst/>
+          </a:prstGeom>
+          <a:solidFill>
+            <a:srgbClr val="275185"/>
+          </a:solidFill>
+          <a:ln>
+            <a:solidFill>
+              <a:srgbClr val="275185"/>
+            </a:solidFill>
+          </a:ln>
+        </p:spPr>
+        <p:style>
+          <a:lnRef idx="1">
+            <a:schemeClr val="accent1"/>
+          </a:lnRef>
+          <a:fillRef idx="3">
+            <a:schemeClr val="accent1"/>
+          </a:fillRef>
+          <a:effectRef idx="2">
+            <a:schemeClr val="accent1"/>
+          </a:effectRef>
+          <a:fontRef idx="minor">
+            <a:schemeClr val="lt1"/>
+          </a:fontRef>
+        </p:style>
+        <p:txBody>
+          <a:bodyPr rtlCol="0" anchor="ctr"/>
+          <a:lstStyle/>
+          <a:p>
+            <a:pPr algn="ctr"/>
+          </a:p>
+        </p:txBody>
+      </p:sp>
+      <p:sp>
+        <p:nvSpPr>
+          <p:cNvPr id="19" name="TextBox 18"/>
+          <p:cNvSpPr txBox="1"/>
+          <p:nvPr/>
+        </p:nvSpPr>
+        <p:spPr>
+          <a:xfrm>
+            <a:off x="1097280" y="5120640"/>
+            <a:ext cx="10012680" cy="384048"/>
+          </a:xfrm>
+          <a:prstGeom prst="rect">
+            <a:avLst/>
+          </a:prstGeom>
+          <a:noFill/>
+        </p:spPr>
+        <p:txBody>
+          <a:bodyPr wrap="square" lIns="54864" rIns="54864" tIns="18288" bIns="18288">
+            <a:spAutoFit/>
+          </a:bodyPr>
+          <a:lstStyle/>
+          <a:p>
+            <a:pPr algn="l"/>
+            <a:r>
+              <a:rPr sz="1500" b="0">
+                <a:solidFill>
+                  <a:srgbClr val="253446"/>
+                </a:solidFill>
+                <a:latin typeface="Aptos"/>
+              </a:rPr>
+              <a:t>4 min prep · 2 min pitch per vendor · 4 min panel questions · 5 min decision. Marketing claims do not establish compliance.</a:t>
+            </a:r>
+          </a:p>
+        </p:txBody>
+      </p:sp>
+      <p:sp>
+        <p:nvSpPr>
+          <p:cNvPr id="20" name="TextBox 19"/>
+          <p:cNvSpPr txBox="1"/>
+          <p:nvPr/>
+        </p:nvSpPr>
+        <p:spPr>
+          <a:xfrm>
+            <a:off x="11704320" y="6565392"/>
+            <a:ext cx="411480" cy="182880"/>
+          </a:xfrm>
+          <a:prstGeom prst="rect">
+            <a:avLst/>
+          </a:prstGeom>
+          <a:noFill/>
+        </p:spPr>
+        <p:txBody>
+          <a:bodyPr wrap="square" lIns="54864" rIns="54864" tIns="18288" bIns="18288">
+            <a:spAutoFit/>
+          </a:bodyPr>
+          <a:lstStyle/>
+          <a:p>
+            <a:r>
+              <a:t>59</a:t>
+            </a:r>
+          </a:p>
+        </p:txBody>
+      </p:sp>
+      <p:sp>
+        <p:nvSpPr>
+          <p:cNvPr id="21" name="TextBox 20"/>
+          <p:cNvSpPr txBox="1"/>
+          <p:nvPr/>
+        </p:nvSpPr>
+        <p:spPr>
+          <a:xfrm>
+            <a:off x="594360" y="5907024"/>
+            <a:ext cx="10972800" cy="274320"/>
+          </a:xfrm>
+          <a:prstGeom prst="rect">
+            <a:avLst/>
+          </a:prstGeom>
+          <a:noFill/>
+        </p:spPr>
+        <p:txBody>
+          <a:bodyPr wrap="none" anchor="ctr">
+            <a:spAutoFit/>
+          </a:bodyPr>
+          <a:lstStyle/>
+          <a:p>
+            <a:pPr algn="ctr"/>
+            <a:r>
+              <a:rPr sz="1100" b="1">
+                <a:solidFill>
+                  <a:srgbClr val="245487"/>
+                </a:solidFill>
+                <a:latin typeface="Aptos"/>
+                <a:hlinkClick r:id="rId2"/>
+              </a:rPr>
+              <a:t>Reference: CISA Secure by Demand Guide ↗</a:t>
+            </a:r>
+          </a:p>
+        </p:txBody>
+      </p:sp>
+    </p:spTree>
+  </p:cSld>
+  <p:clrMapOvr>
+    <a:masterClrMapping/>
+  </p:clrMapOvr>
+</p:sld>
+</file>
+
 <file path=ppt/slides/slide6.xml><?xml version="1.0" encoding="utf-8"?>
 <p:sld xmlns:a="http://schemas.openxmlformats.org/drawingml/2006/main" xmlns:p="http://schemas.openxmlformats.org/presentationml/2006/main" xmlns:r="http://schemas.openxmlformats.org/officeDocument/2006/relationships">
   <p:cSld>
@@ -50457,6 +51252,1590 @@
                 <a:hlinkClick r:id="rId2"/>
               </a:rPr>
               <a:t>Source: CIS Controls v8.1, Control 4  ↗</a:t>
+            </a:r>
+          </a:p>
+        </p:txBody>
+      </p:sp>
+    </p:spTree>
+  </p:cSld>
+  <p:clrMapOvr>
+    <a:masterClrMapping/>
+  </p:clrMapOvr>
+</p:sld>
+</file>
+
+<file path=ppt/slides/slide60.xml><?xml version="1.0" encoding="utf-8"?>
+<p:sld xmlns:a="http://schemas.openxmlformats.org/drawingml/2006/main" xmlns:p="http://schemas.openxmlformats.org/presentationml/2006/main" xmlns:r="http://schemas.openxmlformats.org/officeDocument/2006/relationships">
+  <p:cSld>
+    <p:spTree>
+      <p:nvGrpSpPr>
+        <p:cNvPr id="1" name=""/>
+        <p:cNvGrpSpPr/>
+        <p:nvPr/>
+      </p:nvGrpSpPr>
+      <p:grpSpPr/>
+      <p:sp>
+        <p:nvSpPr>
+          <p:cNvPr id="2" name="TextBox 1"/>
+          <p:cNvSpPr txBox="1"/>
+          <p:nvPr/>
+        </p:nvSpPr>
+        <p:spPr>
+          <a:xfrm>
+            <a:off x="502920" y="320040"/>
+            <a:ext cx="8046720" cy="210312"/>
+          </a:xfrm>
+          <a:prstGeom prst="rect">
+            <a:avLst/>
+          </a:prstGeom>
+          <a:noFill/>
+        </p:spPr>
+        <p:txBody>
+          <a:bodyPr wrap="square" lIns="54864" rIns="54864" tIns="18288" bIns="18288">
+            <a:spAutoFit/>
+          </a:bodyPr>
+          <a:lstStyle/>
+          <a:p>
+            <a:pPr algn="l"/>
+            <a:r>
+              <a:rPr sz="1100" b="1">
+                <a:solidFill>
+                  <a:srgbClr val="49B1C7"/>
+                </a:solidFill>
+                <a:latin typeface="Aptos"/>
+              </a:rPr>
+              <a:t>TABLETOP EXERCISE</a:t>
+            </a:r>
+          </a:p>
+        </p:txBody>
+      </p:sp>
+      <p:sp>
+        <p:nvSpPr>
+          <p:cNvPr id="3" name="TextBox 2"/>
+          <p:cNvSpPr txBox="1"/>
+          <p:nvPr/>
+        </p:nvSpPr>
+        <p:spPr>
+          <a:xfrm>
+            <a:off x="502920" y="566928"/>
+            <a:ext cx="10972800" cy="548640"/>
+          </a:xfrm>
+          <a:prstGeom prst="rect">
+            <a:avLst/>
+          </a:prstGeom>
+          <a:noFill/>
+        </p:spPr>
+        <p:txBody>
+          <a:bodyPr wrap="square" lIns="54864" rIns="54864" tIns="18288" bIns="18288">
+            <a:spAutoFit/>
+          </a:bodyPr>
+          <a:lstStyle/>
+          <a:p>
+            <a:pPr algn="l"/>
+            <a:r>
+              <a:rPr sz="2700" b="1">
+                <a:solidFill>
+                  <a:srgbClr val="275185"/>
+                </a:solidFill>
+                <a:latin typeface="Aptos"/>
+              </a:rPr>
+              <a:t>Campus file service incident</a:t>
+            </a:r>
+          </a:p>
+        </p:txBody>
+      </p:sp>
+      <p:sp>
+        <p:nvSpPr>
+          <p:cNvPr id="4" name="TextBox 3"/>
+          <p:cNvSpPr txBox="1"/>
+          <p:nvPr/>
+        </p:nvSpPr>
+        <p:spPr>
+          <a:xfrm>
+            <a:off x="530352" y="1133856"/>
+            <a:ext cx="10698480" cy="356616"/>
+          </a:xfrm>
+          <a:prstGeom prst="rect">
+            <a:avLst/>
+          </a:prstGeom>
+          <a:noFill/>
+        </p:spPr>
+        <p:txBody>
+          <a:bodyPr wrap="square" lIns="54864" rIns="54864" tIns="18288" bIns="18288">
+            <a:spAutoFit/>
+          </a:bodyPr>
+          <a:lstStyle/>
+          <a:p>
+            <a:pPr algn="l"/>
+            <a:r>
+              <a:rPr sz="1400" b="0">
+                <a:solidFill>
+                  <a:srgbClr val="647891"/>
+                </a:solidFill>
+                <a:latin typeface="Aptos"/>
+              </a:rPr>
+              <a:t>Work as an incident team with incomplete information and pressure to restore service.</a:t>
+            </a:r>
+          </a:p>
+        </p:txBody>
+      </p:sp>
+      <p:sp>
+        <p:nvSpPr>
+          <p:cNvPr id="5" name="Rounded Rectangle 4"/>
+          <p:cNvSpPr/>
+          <p:nvPr/>
+        </p:nvSpPr>
+        <p:spPr>
+          <a:xfrm>
+            <a:off x="640080" y="1975104"/>
+            <a:ext cx="3517391" cy="2468880"/>
+          </a:xfrm>
+          <a:prstGeom prst="roundRect">
+            <a:avLst/>
+          </a:prstGeom>
+          <a:solidFill>
+            <a:srgbClr val="FFFFFF"/>
+          </a:solidFill>
+          <a:ln w="12700">
+            <a:solidFill>
+              <a:srgbClr val="C9D5E2"/>
+            </a:solidFill>
+          </a:ln>
+        </p:spPr>
+        <p:style>
+          <a:lnRef idx="1">
+            <a:schemeClr val="accent1"/>
+          </a:lnRef>
+          <a:fillRef idx="3">
+            <a:schemeClr val="accent1"/>
+          </a:fillRef>
+          <a:effectRef idx="2">
+            <a:schemeClr val="accent1"/>
+          </a:effectRef>
+          <a:fontRef idx="minor">
+            <a:schemeClr val="lt1"/>
+          </a:fontRef>
+        </p:style>
+        <p:txBody>
+          <a:bodyPr rtlCol="0" anchor="ctr"/>
+          <a:lstStyle/>
+          <a:p>
+            <a:pPr algn="ctr"/>
+          </a:p>
+        </p:txBody>
+      </p:sp>
+      <p:sp>
+        <p:nvSpPr>
+          <p:cNvPr id="6" name="Rounded Rectangle 5"/>
+          <p:cNvSpPr/>
+          <p:nvPr/>
+        </p:nvSpPr>
+        <p:spPr>
+          <a:xfrm>
+            <a:off x="640080" y="1975104"/>
+            <a:ext cx="3517391" cy="347472"/>
+          </a:xfrm>
+          <a:prstGeom prst="roundRect">
+            <a:avLst/>
+          </a:prstGeom>
+          <a:solidFill>
+            <a:srgbClr val="49B1C7"/>
+          </a:solidFill>
+          <a:ln>
+            <a:solidFill>
+              <a:srgbClr val="49B1C7"/>
+            </a:solidFill>
+          </a:ln>
+        </p:spPr>
+        <p:style>
+          <a:lnRef idx="1">
+            <a:schemeClr val="accent1"/>
+          </a:lnRef>
+          <a:fillRef idx="3">
+            <a:schemeClr val="accent1"/>
+          </a:fillRef>
+          <a:effectRef idx="2">
+            <a:schemeClr val="accent1"/>
+          </a:effectRef>
+          <a:fontRef idx="minor">
+            <a:schemeClr val="lt1"/>
+          </a:fontRef>
+        </p:style>
+        <p:txBody>
+          <a:bodyPr rtlCol="0" anchor="ctr"/>
+          <a:lstStyle/>
+          <a:p>
+            <a:pPr algn="ctr"/>
+          </a:p>
+        </p:txBody>
+      </p:sp>
+      <p:sp>
+        <p:nvSpPr>
+          <p:cNvPr id="7" name="TextBox 6"/>
+          <p:cNvSpPr txBox="1"/>
+          <p:nvPr/>
+        </p:nvSpPr>
+        <p:spPr>
+          <a:xfrm>
+            <a:off x="713231" y="2020824"/>
+            <a:ext cx="3371087" cy="246888"/>
+          </a:xfrm>
+          <a:prstGeom prst="rect">
+            <a:avLst/>
+          </a:prstGeom>
+          <a:noFill/>
+        </p:spPr>
+        <p:txBody>
+          <a:bodyPr wrap="square" lIns="54864" rIns="54864" tIns="18288" bIns="18288">
+            <a:spAutoFit/>
+          </a:bodyPr>
+          <a:lstStyle/>
+          <a:p>
+            <a:pPr algn="ctr"/>
+            <a:r>
+              <a:rPr sz="1300" b="1">
+                <a:solidFill>
+                  <a:srgbClr val="FFFFFF"/>
+                </a:solidFill>
+                <a:latin typeface="Aptos"/>
+              </a:rPr>
+              <a:t>SCENARIO</a:t>
+            </a:r>
+          </a:p>
+        </p:txBody>
+      </p:sp>
+      <p:sp>
+        <p:nvSpPr>
+          <p:cNvPr id="8" name="TextBox 7"/>
+          <p:cNvSpPr txBox="1"/>
+          <p:nvPr/>
+        </p:nvSpPr>
+        <p:spPr>
+          <a:xfrm>
+            <a:off x="804671" y="2496312"/>
+            <a:ext cx="3188207" cy="1810512"/>
+          </a:xfrm>
+          <a:prstGeom prst="rect">
+            <a:avLst/>
+          </a:prstGeom>
+          <a:noFill/>
+        </p:spPr>
+        <p:txBody>
+          <a:bodyPr wrap="square" lIns="54864" rIns="54864" tIns="18288" bIns="18288">
+            <a:spAutoFit/>
+          </a:bodyPr>
+          <a:lstStyle/>
+          <a:p>
+            <a:pPr algn="ctr"/>
+            <a:r>
+              <a:rPr sz="1400" b="0">
+                <a:solidFill>
+                  <a:srgbClr val="253446"/>
+                </a:solidFill>
+                <a:latin typeface="Aptos"/>
+              </a:rPr>
+              <a:t>A campus cloud file service stores student and employee documents. Users report unexpected changes to shared files; most folders remain available.</a:t>
+            </a:r>
+          </a:p>
+        </p:txBody>
+      </p:sp>
+      <p:sp>
+        <p:nvSpPr>
+          <p:cNvPr id="9" name="Rounded Rectangle 8"/>
+          <p:cNvSpPr/>
+          <p:nvPr/>
+        </p:nvSpPr>
+        <p:spPr>
+          <a:xfrm>
+            <a:off x="4367784" y="1975104"/>
+            <a:ext cx="3517391" cy="2468880"/>
+          </a:xfrm>
+          <a:prstGeom prst="roundRect">
+            <a:avLst/>
+          </a:prstGeom>
+          <a:solidFill>
+            <a:srgbClr val="FFFFFF"/>
+          </a:solidFill>
+          <a:ln w="12700">
+            <a:solidFill>
+              <a:srgbClr val="C9D5E2"/>
+            </a:solidFill>
+          </a:ln>
+        </p:spPr>
+        <p:style>
+          <a:lnRef idx="1">
+            <a:schemeClr val="accent1"/>
+          </a:lnRef>
+          <a:fillRef idx="3">
+            <a:schemeClr val="accent1"/>
+          </a:fillRef>
+          <a:effectRef idx="2">
+            <a:schemeClr val="accent1"/>
+          </a:effectRef>
+          <a:fontRef idx="minor">
+            <a:schemeClr val="lt1"/>
+          </a:fontRef>
+        </p:style>
+        <p:txBody>
+          <a:bodyPr rtlCol="0" anchor="ctr"/>
+          <a:lstStyle/>
+          <a:p>
+            <a:pPr algn="ctr"/>
+          </a:p>
+        </p:txBody>
+      </p:sp>
+      <p:sp>
+        <p:nvSpPr>
+          <p:cNvPr id="10" name="Rounded Rectangle 9"/>
+          <p:cNvSpPr/>
+          <p:nvPr/>
+        </p:nvSpPr>
+        <p:spPr>
+          <a:xfrm>
+            <a:off x="4367784" y="1975104"/>
+            <a:ext cx="3517391" cy="347472"/>
+          </a:xfrm>
+          <a:prstGeom prst="roundRect">
+            <a:avLst/>
+          </a:prstGeom>
+          <a:solidFill>
+            <a:srgbClr val="4D83BF"/>
+          </a:solidFill>
+          <a:ln>
+            <a:solidFill>
+              <a:srgbClr val="4D83BF"/>
+            </a:solidFill>
+          </a:ln>
+        </p:spPr>
+        <p:style>
+          <a:lnRef idx="1">
+            <a:schemeClr val="accent1"/>
+          </a:lnRef>
+          <a:fillRef idx="3">
+            <a:schemeClr val="accent1"/>
+          </a:fillRef>
+          <a:effectRef idx="2">
+            <a:schemeClr val="accent1"/>
+          </a:effectRef>
+          <a:fontRef idx="minor">
+            <a:schemeClr val="lt1"/>
+          </a:fontRef>
+        </p:style>
+        <p:txBody>
+          <a:bodyPr rtlCol="0" anchor="ctr"/>
+          <a:lstStyle/>
+          <a:p>
+            <a:pPr algn="ctr"/>
+          </a:p>
+        </p:txBody>
+      </p:sp>
+      <p:sp>
+        <p:nvSpPr>
+          <p:cNvPr id="11" name="TextBox 10"/>
+          <p:cNvSpPr txBox="1"/>
+          <p:nvPr/>
+        </p:nvSpPr>
+        <p:spPr>
+          <a:xfrm>
+            <a:off x="4440936" y="2020824"/>
+            <a:ext cx="3371087" cy="246888"/>
+          </a:xfrm>
+          <a:prstGeom prst="rect">
+            <a:avLst/>
+          </a:prstGeom>
+          <a:noFill/>
+        </p:spPr>
+        <p:txBody>
+          <a:bodyPr wrap="square" lIns="54864" rIns="54864" tIns="18288" bIns="18288">
+            <a:spAutoFit/>
+          </a:bodyPr>
+          <a:lstStyle/>
+          <a:p>
+            <a:pPr algn="ctr"/>
+            <a:r>
+              <a:rPr sz="1300" b="1">
+                <a:solidFill>
+                  <a:srgbClr val="FFFFFF"/>
+                </a:solidFill>
+                <a:latin typeface="Aptos"/>
+              </a:rPr>
+              <a:t>TEAM ROLES</a:t>
+            </a:r>
+          </a:p>
+        </p:txBody>
+      </p:sp>
+      <p:sp>
+        <p:nvSpPr>
+          <p:cNvPr id="12" name="TextBox 11"/>
+          <p:cNvSpPr txBox="1"/>
+          <p:nvPr/>
+        </p:nvSpPr>
+        <p:spPr>
+          <a:xfrm>
+            <a:off x="4532375" y="2496312"/>
+            <a:ext cx="3188207" cy="1810512"/>
+          </a:xfrm>
+          <a:prstGeom prst="rect">
+            <a:avLst/>
+          </a:prstGeom>
+          <a:noFill/>
+        </p:spPr>
+        <p:txBody>
+          <a:bodyPr wrap="square" lIns="54864" rIns="54864" tIns="18288" bIns="18288">
+            <a:spAutoFit/>
+          </a:bodyPr>
+          <a:lstStyle/>
+          <a:p>
+            <a:pPr algn="ctr"/>
+            <a:r>
+              <a:rPr sz="1400" b="0">
+                <a:solidFill>
+                  <a:srgbClr val="253446"/>
+                </a:solidFill>
+                <a:latin typeface="Aptos"/>
+              </a:rPr>
+              <a:t>Incident lead coordinates. Sysadmin checks scope, accounts, logs, and backups. Service owner tracks impact. Privacy liaison routes data questions to campus officials.</a:t>
+            </a:r>
+          </a:p>
+        </p:txBody>
+      </p:sp>
+      <p:sp>
+        <p:nvSpPr>
+          <p:cNvPr id="13" name="Rounded Rectangle 12"/>
+          <p:cNvSpPr/>
+          <p:nvPr/>
+        </p:nvSpPr>
+        <p:spPr>
+          <a:xfrm>
+            <a:off x="8095487" y="1975104"/>
+            <a:ext cx="3517391" cy="2468880"/>
+          </a:xfrm>
+          <a:prstGeom prst="roundRect">
+            <a:avLst/>
+          </a:prstGeom>
+          <a:solidFill>
+            <a:srgbClr val="FFFFFF"/>
+          </a:solidFill>
+          <a:ln w="12700">
+            <a:solidFill>
+              <a:srgbClr val="C9D5E2"/>
+            </a:solidFill>
+          </a:ln>
+        </p:spPr>
+        <p:style>
+          <a:lnRef idx="1">
+            <a:schemeClr val="accent1"/>
+          </a:lnRef>
+          <a:fillRef idx="3">
+            <a:schemeClr val="accent1"/>
+          </a:fillRef>
+          <a:effectRef idx="2">
+            <a:schemeClr val="accent1"/>
+          </a:effectRef>
+          <a:fontRef idx="minor">
+            <a:schemeClr val="lt1"/>
+          </a:fontRef>
+        </p:style>
+        <p:txBody>
+          <a:bodyPr rtlCol="0" anchor="ctr"/>
+          <a:lstStyle/>
+          <a:p>
+            <a:pPr algn="ctr"/>
+          </a:p>
+        </p:txBody>
+      </p:sp>
+      <p:sp>
+        <p:nvSpPr>
+          <p:cNvPr id="14" name="Rounded Rectangle 13"/>
+          <p:cNvSpPr/>
+          <p:nvPr/>
+        </p:nvSpPr>
+        <p:spPr>
+          <a:xfrm>
+            <a:off x="8095487" y="1975104"/>
+            <a:ext cx="3517391" cy="347472"/>
+          </a:xfrm>
+          <a:prstGeom prst="roundRect">
+            <a:avLst/>
+          </a:prstGeom>
+          <a:solidFill>
+            <a:srgbClr val="F79441"/>
+          </a:solidFill>
+          <a:ln>
+            <a:solidFill>
+              <a:srgbClr val="F79441"/>
+            </a:solidFill>
+          </a:ln>
+        </p:spPr>
+        <p:style>
+          <a:lnRef idx="1">
+            <a:schemeClr val="accent1"/>
+          </a:lnRef>
+          <a:fillRef idx="3">
+            <a:schemeClr val="accent1"/>
+          </a:fillRef>
+          <a:effectRef idx="2">
+            <a:schemeClr val="accent1"/>
+          </a:effectRef>
+          <a:fontRef idx="minor">
+            <a:schemeClr val="lt1"/>
+          </a:fontRef>
+        </p:style>
+        <p:txBody>
+          <a:bodyPr rtlCol="0" anchor="ctr"/>
+          <a:lstStyle/>
+          <a:p>
+            <a:pPr algn="ctr"/>
+          </a:p>
+        </p:txBody>
+      </p:sp>
+      <p:sp>
+        <p:nvSpPr>
+          <p:cNvPr id="15" name="TextBox 14"/>
+          <p:cNvSpPr txBox="1"/>
+          <p:nvPr/>
+        </p:nvSpPr>
+        <p:spPr>
+          <a:xfrm>
+            <a:off x="8168639" y="2020824"/>
+            <a:ext cx="3371087" cy="246888"/>
+          </a:xfrm>
+          <a:prstGeom prst="rect">
+            <a:avLst/>
+          </a:prstGeom>
+          <a:noFill/>
+        </p:spPr>
+        <p:txBody>
+          <a:bodyPr wrap="square" lIns="54864" rIns="54864" tIns="18288" bIns="18288">
+            <a:spAutoFit/>
+          </a:bodyPr>
+          <a:lstStyle/>
+          <a:p>
+            <a:pPr algn="ctr"/>
+            <a:r>
+              <a:rPr sz="1300" b="1">
+                <a:solidFill>
+                  <a:srgbClr val="FFFFFF"/>
+                </a:solidFill>
+                <a:latin typeface="Aptos"/>
+              </a:rPr>
+              <a:t>TEAM OBJECTIVE</a:t>
+            </a:r>
+          </a:p>
+        </p:txBody>
+      </p:sp>
+      <p:sp>
+        <p:nvSpPr>
+          <p:cNvPr id="16" name="TextBox 15"/>
+          <p:cNvSpPr txBox="1"/>
+          <p:nvPr/>
+        </p:nvSpPr>
+        <p:spPr>
+          <a:xfrm>
+            <a:off x="8260079" y="2496312"/>
+            <a:ext cx="3188207" cy="1810512"/>
+          </a:xfrm>
+          <a:prstGeom prst="rect">
+            <a:avLst/>
+          </a:prstGeom>
+          <a:noFill/>
+        </p:spPr>
+        <p:txBody>
+          <a:bodyPr wrap="square" lIns="54864" rIns="54864" tIns="18288" bIns="18288">
+            <a:spAutoFit/>
+          </a:bodyPr>
+          <a:lstStyle/>
+          <a:p>
+            <a:pPr algn="ctr"/>
+            <a:r>
+              <a:rPr sz="1400" b="0">
+                <a:solidFill>
+                  <a:srgbClr val="253446"/>
+                </a:solidFill>
+                <a:latin typeface="Aptos"/>
+              </a:rPr>
+              <a:t>Decide what to contain, what evidence to preserve, and how to verify recovery. Identify who owns each decision and state your assumptions.</a:t>
+            </a:r>
+          </a:p>
+        </p:txBody>
+      </p:sp>
+      <p:sp>
+        <p:nvSpPr>
+          <p:cNvPr id="17" name="Rounded Rectangle 16"/>
+          <p:cNvSpPr/>
+          <p:nvPr/>
+        </p:nvSpPr>
+        <p:spPr>
+          <a:xfrm>
+            <a:off x="841248" y="5010912"/>
+            <a:ext cx="10515600" cy="603504"/>
+          </a:xfrm>
+          <a:prstGeom prst="roundRect">
+            <a:avLst/>
+          </a:prstGeom>
+          <a:solidFill>
+            <a:srgbClr val="FFFFFF"/>
+          </a:solidFill>
+          <a:ln w="13970">
+            <a:solidFill>
+              <a:srgbClr val="275185"/>
+            </a:solidFill>
+          </a:ln>
+        </p:spPr>
+        <p:style>
+          <a:lnRef idx="1">
+            <a:schemeClr val="accent1"/>
+          </a:lnRef>
+          <a:fillRef idx="3">
+            <a:schemeClr val="accent1"/>
+          </a:fillRef>
+          <a:effectRef idx="2">
+            <a:schemeClr val="accent1"/>
+          </a:effectRef>
+          <a:fontRef idx="minor">
+            <a:schemeClr val="lt1"/>
+          </a:fontRef>
+        </p:style>
+        <p:txBody>
+          <a:bodyPr rtlCol="0" anchor="ctr"/>
+          <a:lstStyle/>
+          <a:p>
+            <a:pPr algn="ctr"/>
+          </a:p>
+        </p:txBody>
+      </p:sp>
+      <p:sp>
+        <p:nvSpPr>
+          <p:cNvPr id="18" name="Rectangle 17"/>
+          <p:cNvSpPr/>
+          <p:nvPr/>
+        </p:nvSpPr>
+        <p:spPr>
+          <a:xfrm>
+            <a:off x="841248" y="5010912"/>
+            <a:ext cx="100584" cy="603504"/>
+          </a:xfrm>
+          <a:prstGeom prst="rect">
+            <a:avLst/>
+          </a:prstGeom>
+          <a:solidFill>
+            <a:srgbClr val="275185"/>
+          </a:solidFill>
+          <a:ln>
+            <a:solidFill>
+              <a:srgbClr val="275185"/>
+            </a:solidFill>
+          </a:ln>
+        </p:spPr>
+        <p:style>
+          <a:lnRef idx="1">
+            <a:schemeClr val="accent1"/>
+          </a:lnRef>
+          <a:fillRef idx="3">
+            <a:schemeClr val="accent1"/>
+          </a:fillRef>
+          <a:effectRef idx="2">
+            <a:schemeClr val="accent1"/>
+          </a:effectRef>
+          <a:fontRef idx="minor">
+            <a:schemeClr val="lt1"/>
+          </a:fontRef>
+        </p:style>
+        <p:txBody>
+          <a:bodyPr rtlCol="0" anchor="ctr"/>
+          <a:lstStyle/>
+          <a:p>
+            <a:pPr algn="ctr"/>
+          </a:p>
+        </p:txBody>
+      </p:sp>
+      <p:sp>
+        <p:nvSpPr>
+          <p:cNvPr id="19" name="TextBox 18"/>
+          <p:cNvSpPr txBox="1"/>
+          <p:nvPr/>
+        </p:nvSpPr>
+        <p:spPr>
+          <a:xfrm>
+            <a:off x="1097280" y="5120640"/>
+            <a:ext cx="10012680" cy="384048"/>
+          </a:xfrm>
+          <a:prstGeom prst="rect">
+            <a:avLst/>
+          </a:prstGeom>
+          <a:noFill/>
+        </p:spPr>
+        <p:txBody>
+          <a:bodyPr wrap="square" lIns="54864" rIns="54864" tIns="18288" bIns="18288">
+            <a:spAutoFit/>
+          </a:bodyPr>
+          <a:lstStyle/>
+          <a:p>
+            <a:pPr algn="l"/>
+            <a:r>
+              <a:rPr sz="1500" b="0">
+                <a:solidFill>
+                  <a:srgbClr val="253446"/>
+                </a:solidFill>
+                <a:latin typeface="Aptos"/>
+              </a:rPr>
+              <a:t>Discussion only: do not change real systems or contact a real provider. Take 25 minutes; record decisions, owners, and evidence.</a:t>
+            </a:r>
+          </a:p>
+        </p:txBody>
+      </p:sp>
+      <p:sp>
+        <p:nvSpPr>
+          <p:cNvPr id="20" name="TextBox 19"/>
+          <p:cNvSpPr txBox="1"/>
+          <p:nvPr/>
+        </p:nvSpPr>
+        <p:spPr>
+          <a:xfrm>
+            <a:off x="11704320" y="6565392"/>
+            <a:ext cx="411480" cy="182880"/>
+          </a:xfrm>
+          <a:prstGeom prst="rect">
+            <a:avLst/>
+          </a:prstGeom>
+          <a:noFill/>
+        </p:spPr>
+        <p:txBody>
+          <a:bodyPr wrap="square" lIns="54864" rIns="54864" tIns="18288" bIns="18288">
+            <a:spAutoFit/>
+          </a:bodyPr>
+          <a:lstStyle/>
+          <a:p>
+            <a:r>
+              <a:t>60</a:t>
+            </a:r>
+          </a:p>
+        </p:txBody>
+      </p:sp>
+      <p:sp>
+        <p:nvSpPr>
+          <p:cNvPr id="21" name="TextBox 20"/>
+          <p:cNvSpPr txBox="1"/>
+          <p:nvPr/>
+        </p:nvSpPr>
+        <p:spPr>
+          <a:xfrm>
+            <a:off x="594360" y="5907024"/>
+            <a:ext cx="10972800" cy="274320"/>
+          </a:xfrm>
+          <a:prstGeom prst="rect">
+            <a:avLst/>
+          </a:prstGeom>
+          <a:noFill/>
+        </p:spPr>
+        <p:txBody>
+          <a:bodyPr wrap="none" anchor="ctr">
+            <a:spAutoFit/>
+          </a:bodyPr>
+          <a:lstStyle/>
+          <a:p>
+            <a:pPr algn="ctr"/>
+            <a:r>
+              <a:rPr sz="1100" b="1">
+                <a:solidFill>
+                  <a:srgbClr val="245487"/>
+                </a:solidFill>
+                <a:latin typeface="Aptos"/>
+                <a:hlinkClick r:id="rId2"/>
+              </a:rPr>
+              <a:t>Format reference: CISA Cybersecurity Tabletop Exercise Tips ↗</a:t>
+            </a:r>
+          </a:p>
+        </p:txBody>
+      </p:sp>
+    </p:spTree>
+  </p:cSld>
+  <p:clrMapOvr>
+    <a:masterClrMapping/>
+  </p:clrMapOvr>
+</p:sld>
+</file>
+
+<file path=ppt/slides/slide61.xml><?xml version="1.0" encoding="utf-8"?>
+<p:sld xmlns:a="http://schemas.openxmlformats.org/drawingml/2006/main" xmlns:p="http://schemas.openxmlformats.org/presentationml/2006/main" xmlns:r="http://schemas.openxmlformats.org/officeDocument/2006/relationships">
+  <p:cSld>
+    <p:spTree>
+      <p:nvGrpSpPr>
+        <p:cNvPr id="1" name=""/>
+        <p:cNvGrpSpPr/>
+        <p:nvPr/>
+      </p:nvGrpSpPr>
+      <p:grpSpPr/>
+      <p:sp>
+        <p:nvSpPr>
+          <p:cNvPr id="2" name="TextBox 1"/>
+          <p:cNvSpPr txBox="1"/>
+          <p:nvPr/>
+        </p:nvSpPr>
+        <p:spPr>
+          <a:xfrm>
+            <a:off x="502920" y="320040"/>
+            <a:ext cx="8046720" cy="210312"/>
+          </a:xfrm>
+          <a:prstGeom prst="rect">
+            <a:avLst/>
+          </a:prstGeom>
+          <a:noFill/>
+        </p:spPr>
+        <p:txBody>
+          <a:bodyPr wrap="square" lIns="54864" rIns="54864" tIns="18288" bIns="18288">
+            <a:spAutoFit/>
+          </a:bodyPr>
+          <a:lstStyle/>
+          <a:p>
+            <a:pPr algn="l"/>
+            <a:r>
+              <a:rPr sz="1100" b="1">
+                <a:solidFill>
+                  <a:srgbClr val="49B1C7"/>
+                </a:solidFill>
+                <a:latin typeface="Aptos"/>
+              </a:rPr>
+              <a:t>TABLETOP · INJECTS</a:t>
+            </a:r>
+          </a:p>
+        </p:txBody>
+      </p:sp>
+      <p:sp>
+        <p:nvSpPr>
+          <p:cNvPr id="3" name="TextBox 2"/>
+          <p:cNvSpPr txBox="1"/>
+          <p:nvPr/>
+        </p:nvSpPr>
+        <p:spPr>
+          <a:xfrm>
+            <a:off x="502920" y="566928"/>
+            <a:ext cx="10972800" cy="548640"/>
+          </a:xfrm>
+          <a:prstGeom prst="rect">
+            <a:avLst/>
+          </a:prstGeom>
+          <a:noFill/>
+        </p:spPr>
+        <p:txBody>
+          <a:bodyPr wrap="square" lIns="54864" rIns="54864" tIns="18288" bIns="18288">
+            <a:spAutoFit/>
+          </a:bodyPr>
+          <a:lstStyle/>
+          <a:p>
+            <a:pPr algn="l"/>
+            <a:r>
+              <a:rPr sz="2700" b="1">
+                <a:solidFill>
+                  <a:srgbClr val="275185"/>
+                </a:solidFill>
+                <a:latin typeface="Aptos"/>
+              </a:rPr>
+              <a:t>Reveal one update at a time</a:t>
+            </a:r>
+          </a:p>
+        </p:txBody>
+      </p:sp>
+      <p:sp>
+        <p:nvSpPr>
+          <p:cNvPr id="4" name="TextBox 3"/>
+          <p:cNvSpPr txBox="1"/>
+          <p:nvPr/>
+        </p:nvSpPr>
+        <p:spPr>
+          <a:xfrm>
+            <a:off x="530352" y="1133856"/>
+            <a:ext cx="10698480" cy="356616"/>
+          </a:xfrm>
+          <a:prstGeom prst="rect">
+            <a:avLst/>
+          </a:prstGeom>
+          <a:noFill/>
+        </p:spPr>
+        <p:txBody>
+          <a:bodyPr wrap="square" lIns="54864" rIns="54864" tIns="18288" bIns="18288">
+            <a:spAutoFit/>
+          </a:bodyPr>
+          <a:lstStyle/>
+          <a:p>
+            <a:pPr algn="l"/>
+            <a:r>
+              <a:rPr sz="1400" b="0">
+                <a:solidFill>
+                  <a:srgbClr val="647891"/>
+                </a:solidFill>
+                <a:latin typeface="Aptos"/>
+              </a:rPr>
+              <a:t>Give teams 2–3 minutes after each update to make and record their next decision.</a:t>
+            </a:r>
+          </a:p>
+        </p:txBody>
+      </p:sp>
+      <p:sp>
+        <p:nvSpPr>
+          <p:cNvPr id="5" name="Rounded Rectangle 4"/>
+          <p:cNvSpPr/>
+          <p:nvPr/>
+        </p:nvSpPr>
+        <p:spPr>
+          <a:xfrm>
+            <a:off x="640080" y="1975104"/>
+            <a:ext cx="3517391" cy="2468880"/>
+          </a:xfrm>
+          <a:prstGeom prst="roundRect">
+            <a:avLst/>
+          </a:prstGeom>
+          <a:solidFill>
+            <a:srgbClr val="FFFFFF"/>
+          </a:solidFill>
+          <a:ln w="12700">
+            <a:solidFill>
+              <a:srgbClr val="C9D5E2"/>
+            </a:solidFill>
+          </a:ln>
+        </p:spPr>
+        <p:style>
+          <a:lnRef idx="1">
+            <a:schemeClr val="accent1"/>
+          </a:lnRef>
+          <a:fillRef idx="3">
+            <a:schemeClr val="accent1"/>
+          </a:fillRef>
+          <a:effectRef idx="2">
+            <a:schemeClr val="accent1"/>
+          </a:effectRef>
+          <a:fontRef idx="minor">
+            <a:schemeClr val="lt1"/>
+          </a:fontRef>
+        </p:style>
+        <p:txBody>
+          <a:bodyPr rtlCol="0" anchor="ctr"/>
+          <a:lstStyle/>
+          <a:p>
+            <a:pPr algn="ctr"/>
+          </a:p>
+        </p:txBody>
+      </p:sp>
+      <p:sp>
+        <p:nvSpPr>
+          <p:cNvPr id="6" name="Rounded Rectangle 5"/>
+          <p:cNvSpPr/>
+          <p:nvPr/>
+        </p:nvSpPr>
+        <p:spPr>
+          <a:xfrm>
+            <a:off x="640080" y="1975104"/>
+            <a:ext cx="3517391" cy="347472"/>
+          </a:xfrm>
+          <a:prstGeom prst="roundRect">
+            <a:avLst/>
+          </a:prstGeom>
+          <a:solidFill>
+            <a:srgbClr val="49B1C7"/>
+          </a:solidFill>
+          <a:ln>
+            <a:solidFill>
+              <a:srgbClr val="49B1C7"/>
+            </a:solidFill>
+          </a:ln>
+        </p:spPr>
+        <p:style>
+          <a:lnRef idx="1">
+            <a:schemeClr val="accent1"/>
+          </a:lnRef>
+          <a:fillRef idx="3">
+            <a:schemeClr val="accent1"/>
+          </a:fillRef>
+          <a:effectRef idx="2">
+            <a:schemeClr val="accent1"/>
+          </a:effectRef>
+          <a:fontRef idx="minor">
+            <a:schemeClr val="lt1"/>
+          </a:fontRef>
+        </p:style>
+        <p:txBody>
+          <a:bodyPr rtlCol="0" anchor="ctr"/>
+          <a:lstStyle/>
+          <a:p>
+            <a:pPr algn="ctr"/>
+          </a:p>
+        </p:txBody>
+      </p:sp>
+      <p:sp>
+        <p:nvSpPr>
+          <p:cNvPr id="7" name="TextBox 6"/>
+          <p:cNvSpPr txBox="1"/>
+          <p:nvPr/>
+        </p:nvSpPr>
+        <p:spPr>
+          <a:xfrm>
+            <a:off x="713231" y="2020824"/>
+            <a:ext cx="3371087" cy="246888"/>
+          </a:xfrm>
+          <a:prstGeom prst="rect">
+            <a:avLst/>
+          </a:prstGeom>
+          <a:noFill/>
+        </p:spPr>
+        <p:txBody>
+          <a:bodyPr wrap="square" lIns="54864" rIns="54864" tIns="18288" bIns="18288">
+            <a:spAutoFit/>
+          </a:bodyPr>
+          <a:lstStyle/>
+          <a:p>
+            <a:pPr algn="ctr"/>
+            <a:r>
+              <a:rPr sz="1300" b="1">
+                <a:solidFill>
+                  <a:srgbClr val="FFFFFF"/>
+                </a:solidFill>
+                <a:latin typeface="Aptos"/>
+              </a:rPr>
+              <a:t>ROUND 1 · 0 MIN</a:t>
+            </a:r>
+          </a:p>
+        </p:txBody>
+      </p:sp>
+      <p:sp>
+        <p:nvSpPr>
+          <p:cNvPr id="8" name="TextBox 7"/>
+          <p:cNvSpPr txBox="1"/>
+          <p:nvPr/>
+        </p:nvSpPr>
+        <p:spPr>
+          <a:xfrm>
+            <a:off x="804671" y="2496312"/>
+            <a:ext cx="3188207" cy="1810512"/>
+          </a:xfrm>
+          <a:prstGeom prst="rect">
+            <a:avLst/>
+          </a:prstGeom>
+          <a:noFill/>
+        </p:spPr>
+        <p:txBody>
+          <a:bodyPr wrap="square" lIns="54864" rIns="54864" tIns="18288" bIns="18288">
+            <a:spAutoFit/>
+          </a:bodyPr>
+          <a:lstStyle/>
+          <a:p>
+            <a:pPr algn="ctr"/>
+            <a:r>
+              <a:rPr sz="1400" b="0">
+                <a:solidFill>
+                  <a:srgbClr val="253446"/>
+                </a:solidFill>
+                <a:latin typeface="Aptos"/>
+              </a:rPr>
+              <a:t>Several users report changed files. An admin account had an unexpected sign-in. No data access or broad outage is confirmed. What do you check, preserve, and do first?</a:t>
+            </a:r>
+          </a:p>
+        </p:txBody>
+      </p:sp>
+      <p:sp>
+        <p:nvSpPr>
+          <p:cNvPr id="9" name="Rounded Rectangle 8"/>
+          <p:cNvSpPr/>
+          <p:nvPr/>
+        </p:nvSpPr>
+        <p:spPr>
+          <a:xfrm>
+            <a:off x="4367784" y="1975104"/>
+            <a:ext cx="3517391" cy="2468880"/>
+          </a:xfrm>
+          <a:prstGeom prst="roundRect">
+            <a:avLst/>
+          </a:prstGeom>
+          <a:solidFill>
+            <a:srgbClr val="FFFFFF"/>
+          </a:solidFill>
+          <a:ln w="12700">
+            <a:solidFill>
+              <a:srgbClr val="C9D5E2"/>
+            </a:solidFill>
+          </a:ln>
+        </p:spPr>
+        <p:style>
+          <a:lnRef idx="1">
+            <a:schemeClr val="accent1"/>
+          </a:lnRef>
+          <a:fillRef idx="3">
+            <a:schemeClr val="accent1"/>
+          </a:fillRef>
+          <a:effectRef idx="2">
+            <a:schemeClr val="accent1"/>
+          </a:effectRef>
+          <a:fontRef idx="minor">
+            <a:schemeClr val="lt1"/>
+          </a:fontRef>
+        </p:style>
+        <p:txBody>
+          <a:bodyPr rtlCol="0" anchor="ctr"/>
+          <a:lstStyle/>
+          <a:p>
+            <a:pPr algn="ctr"/>
+          </a:p>
+        </p:txBody>
+      </p:sp>
+      <p:sp>
+        <p:nvSpPr>
+          <p:cNvPr id="10" name="Rounded Rectangle 9"/>
+          <p:cNvSpPr/>
+          <p:nvPr/>
+        </p:nvSpPr>
+        <p:spPr>
+          <a:xfrm>
+            <a:off x="4367784" y="1975104"/>
+            <a:ext cx="3517391" cy="347472"/>
+          </a:xfrm>
+          <a:prstGeom prst="roundRect">
+            <a:avLst/>
+          </a:prstGeom>
+          <a:solidFill>
+            <a:srgbClr val="4D83BF"/>
+          </a:solidFill>
+          <a:ln>
+            <a:solidFill>
+              <a:srgbClr val="4D83BF"/>
+            </a:solidFill>
+          </a:ln>
+        </p:spPr>
+        <p:style>
+          <a:lnRef idx="1">
+            <a:schemeClr val="accent1"/>
+          </a:lnRef>
+          <a:fillRef idx="3">
+            <a:schemeClr val="accent1"/>
+          </a:fillRef>
+          <a:effectRef idx="2">
+            <a:schemeClr val="accent1"/>
+          </a:effectRef>
+          <a:fontRef idx="minor">
+            <a:schemeClr val="lt1"/>
+          </a:fontRef>
+        </p:style>
+        <p:txBody>
+          <a:bodyPr rtlCol="0" anchor="ctr"/>
+          <a:lstStyle/>
+          <a:p>
+            <a:pPr algn="ctr"/>
+          </a:p>
+        </p:txBody>
+      </p:sp>
+      <p:sp>
+        <p:nvSpPr>
+          <p:cNvPr id="11" name="TextBox 10"/>
+          <p:cNvSpPr txBox="1"/>
+          <p:nvPr/>
+        </p:nvSpPr>
+        <p:spPr>
+          <a:xfrm>
+            <a:off x="4440936" y="2020824"/>
+            <a:ext cx="3371087" cy="246888"/>
+          </a:xfrm>
+          <a:prstGeom prst="rect">
+            <a:avLst/>
+          </a:prstGeom>
+          <a:noFill/>
+        </p:spPr>
+        <p:txBody>
+          <a:bodyPr wrap="square" lIns="54864" rIns="54864" tIns="18288" bIns="18288">
+            <a:spAutoFit/>
+          </a:bodyPr>
+          <a:lstStyle/>
+          <a:p>
+            <a:pPr algn="ctr"/>
+            <a:r>
+              <a:rPr sz="1300" b="1">
+                <a:solidFill>
+                  <a:srgbClr val="FFFFFF"/>
+                </a:solidFill>
+                <a:latin typeface="Aptos"/>
+              </a:rPr>
+              <a:t>ROUND 2 · 8 MIN</a:t>
+            </a:r>
+          </a:p>
+        </p:txBody>
+      </p:sp>
+      <p:sp>
+        <p:nvSpPr>
+          <p:cNvPr id="12" name="TextBox 11"/>
+          <p:cNvSpPr txBox="1"/>
+          <p:nvPr/>
+        </p:nvSpPr>
+        <p:spPr>
+          <a:xfrm>
+            <a:off x="4532375" y="2496312"/>
+            <a:ext cx="3188207" cy="1810512"/>
+          </a:xfrm>
+          <a:prstGeom prst="rect">
+            <a:avLst/>
+          </a:prstGeom>
+          <a:noFill/>
+        </p:spPr>
+        <p:txBody>
+          <a:bodyPr wrap="square" lIns="54864" rIns="54864" tIns="18288" bIns="18288">
+            <a:spAutoFit/>
+          </a:bodyPr>
+          <a:lstStyle/>
+          <a:p>
+            <a:pPr algn="ctr"/>
+            <a:r>
+              <a:rPr sz="1400" b="0">
+                <a:solidFill>
+                  <a:srgbClr val="253446"/>
+                </a:solidFill>
+                <a:latin typeface="Aptos"/>
+              </a:rPr>
+              <a:t>The provider reports suspicious activity in another tenant; no broad event is confirmed. Sync may have copied changes. What do you pause or keep running, and who approves?</a:t>
+            </a:r>
+          </a:p>
+        </p:txBody>
+      </p:sp>
+      <p:sp>
+        <p:nvSpPr>
+          <p:cNvPr id="13" name="Rounded Rectangle 12"/>
+          <p:cNvSpPr/>
+          <p:nvPr/>
+        </p:nvSpPr>
+        <p:spPr>
+          <a:xfrm>
+            <a:off x="8095487" y="1975104"/>
+            <a:ext cx="3517391" cy="2468880"/>
+          </a:xfrm>
+          <a:prstGeom prst="roundRect">
+            <a:avLst/>
+          </a:prstGeom>
+          <a:solidFill>
+            <a:srgbClr val="FFFFFF"/>
+          </a:solidFill>
+          <a:ln w="12700">
+            <a:solidFill>
+              <a:srgbClr val="C9D5E2"/>
+            </a:solidFill>
+          </a:ln>
+        </p:spPr>
+        <p:style>
+          <a:lnRef idx="1">
+            <a:schemeClr val="accent1"/>
+          </a:lnRef>
+          <a:fillRef idx="3">
+            <a:schemeClr val="accent1"/>
+          </a:fillRef>
+          <a:effectRef idx="2">
+            <a:schemeClr val="accent1"/>
+          </a:effectRef>
+          <a:fontRef idx="minor">
+            <a:schemeClr val="lt1"/>
+          </a:fontRef>
+        </p:style>
+        <p:txBody>
+          <a:bodyPr rtlCol="0" anchor="ctr"/>
+          <a:lstStyle/>
+          <a:p>
+            <a:pPr algn="ctr"/>
+          </a:p>
+        </p:txBody>
+      </p:sp>
+      <p:sp>
+        <p:nvSpPr>
+          <p:cNvPr id="14" name="Rounded Rectangle 13"/>
+          <p:cNvSpPr/>
+          <p:nvPr/>
+        </p:nvSpPr>
+        <p:spPr>
+          <a:xfrm>
+            <a:off x="8095487" y="1975104"/>
+            <a:ext cx="3517391" cy="347472"/>
+          </a:xfrm>
+          <a:prstGeom prst="roundRect">
+            <a:avLst/>
+          </a:prstGeom>
+          <a:solidFill>
+            <a:srgbClr val="F79441"/>
+          </a:solidFill>
+          <a:ln>
+            <a:solidFill>
+              <a:srgbClr val="F79441"/>
+            </a:solidFill>
+          </a:ln>
+        </p:spPr>
+        <p:style>
+          <a:lnRef idx="1">
+            <a:schemeClr val="accent1"/>
+          </a:lnRef>
+          <a:fillRef idx="3">
+            <a:schemeClr val="accent1"/>
+          </a:fillRef>
+          <a:effectRef idx="2">
+            <a:schemeClr val="accent1"/>
+          </a:effectRef>
+          <a:fontRef idx="minor">
+            <a:schemeClr val="lt1"/>
+          </a:fontRef>
+        </p:style>
+        <p:txBody>
+          <a:bodyPr rtlCol="0" anchor="ctr"/>
+          <a:lstStyle/>
+          <a:p>
+            <a:pPr algn="ctr"/>
+          </a:p>
+        </p:txBody>
+      </p:sp>
+      <p:sp>
+        <p:nvSpPr>
+          <p:cNvPr id="15" name="TextBox 14"/>
+          <p:cNvSpPr txBox="1"/>
+          <p:nvPr/>
+        </p:nvSpPr>
+        <p:spPr>
+          <a:xfrm>
+            <a:off x="8168639" y="2020824"/>
+            <a:ext cx="3371087" cy="246888"/>
+          </a:xfrm>
+          <a:prstGeom prst="rect">
+            <a:avLst/>
+          </a:prstGeom>
+          <a:noFill/>
+        </p:spPr>
+        <p:txBody>
+          <a:bodyPr wrap="square" lIns="54864" rIns="54864" tIns="18288" bIns="18288">
+            <a:spAutoFit/>
+          </a:bodyPr>
+          <a:lstStyle/>
+          <a:p>
+            <a:pPr algn="ctr"/>
+            <a:r>
+              <a:rPr sz="1300" b="1">
+                <a:solidFill>
+                  <a:srgbClr val="FFFFFF"/>
+                </a:solidFill>
+                <a:latin typeface="Aptos"/>
+              </a:rPr>
+              <a:t>ROUND 3 · 16 MIN</a:t>
+            </a:r>
+          </a:p>
+        </p:txBody>
+      </p:sp>
+      <p:sp>
+        <p:nvSpPr>
+          <p:cNvPr id="16" name="TextBox 15"/>
+          <p:cNvSpPr txBox="1"/>
+          <p:nvPr/>
+        </p:nvSpPr>
+        <p:spPr>
+          <a:xfrm>
+            <a:off x="8260079" y="2496312"/>
+            <a:ext cx="3188207" cy="1810512"/>
+          </a:xfrm>
+          <a:prstGeom prst="rect">
+            <a:avLst/>
+          </a:prstGeom>
+          <a:noFill/>
+        </p:spPr>
+        <p:txBody>
+          <a:bodyPr wrap="square" lIns="54864" rIns="54864" tIns="18288" bIns="18288">
+            <a:spAutoFit/>
+          </a:bodyPr>
+          <a:lstStyle/>
+          <a:p>
+            <a:pPr algn="ctr"/>
+            <a:r>
+              <a:rPr sz="1400" b="0">
+                <a:solidFill>
+                  <a:srgbClr val="253446"/>
+                </a:solidFill>
+                <a:latin typeface="Aptos"/>
+              </a:rPr>
+              <a:t>An affected folder includes student records. Backups show green; last restore test was four months ago. Provider estimates 6–18 hours. What must be verified, and who assesses notification duties?</a:t>
+            </a:r>
+          </a:p>
+        </p:txBody>
+      </p:sp>
+      <p:sp>
+        <p:nvSpPr>
+          <p:cNvPr id="17" name="Rounded Rectangle 16"/>
+          <p:cNvSpPr/>
+          <p:nvPr/>
+        </p:nvSpPr>
+        <p:spPr>
+          <a:xfrm>
+            <a:off x="841248" y="5010912"/>
+            <a:ext cx="10515600" cy="603504"/>
+          </a:xfrm>
+          <a:prstGeom prst="roundRect">
+            <a:avLst/>
+          </a:prstGeom>
+          <a:solidFill>
+            <a:srgbClr val="FFFFFF"/>
+          </a:solidFill>
+          <a:ln w="13970">
+            <a:solidFill>
+              <a:srgbClr val="275185"/>
+            </a:solidFill>
+          </a:ln>
+        </p:spPr>
+        <p:style>
+          <a:lnRef idx="1">
+            <a:schemeClr val="accent1"/>
+          </a:lnRef>
+          <a:fillRef idx="3">
+            <a:schemeClr val="accent1"/>
+          </a:fillRef>
+          <a:effectRef idx="2">
+            <a:schemeClr val="accent1"/>
+          </a:effectRef>
+          <a:fontRef idx="minor">
+            <a:schemeClr val="lt1"/>
+          </a:fontRef>
+        </p:style>
+        <p:txBody>
+          <a:bodyPr rtlCol="0" anchor="ctr"/>
+          <a:lstStyle/>
+          <a:p>
+            <a:pPr algn="ctr"/>
+          </a:p>
+        </p:txBody>
+      </p:sp>
+      <p:sp>
+        <p:nvSpPr>
+          <p:cNvPr id="18" name="Rectangle 17"/>
+          <p:cNvSpPr/>
+          <p:nvPr/>
+        </p:nvSpPr>
+        <p:spPr>
+          <a:xfrm>
+            <a:off x="841248" y="5010912"/>
+            <a:ext cx="100584" cy="603504"/>
+          </a:xfrm>
+          <a:prstGeom prst="rect">
+            <a:avLst/>
+          </a:prstGeom>
+          <a:solidFill>
+            <a:srgbClr val="275185"/>
+          </a:solidFill>
+          <a:ln>
+            <a:solidFill>
+              <a:srgbClr val="275185"/>
+            </a:solidFill>
+          </a:ln>
+        </p:spPr>
+        <p:style>
+          <a:lnRef idx="1">
+            <a:schemeClr val="accent1"/>
+          </a:lnRef>
+          <a:fillRef idx="3">
+            <a:schemeClr val="accent1"/>
+          </a:fillRef>
+          <a:effectRef idx="2">
+            <a:schemeClr val="accent1"/>
+          </a:effectRef>
+          <a:fontRef idx="minor">
+            <a:schemeClr val="lt1"/>
+          </a:fontRef>
+        </p:style>
+        <p:txBody>
+          <a:bodyPr rtlCol="0" anchor="ctr"/>
+          <a:lstStyle/>
+          <a:p>
+            <a:pPr algn="ctr"/>
+          </a:p>
+        </p:txBody>
+      </p:sp>
+      <p:sp>
+        <p:nvSpPr>
+          <p:cNvPr id="19" name="TextBox 18"/>
+          <p:cNvSpPr txBox="1"/>
+          <p:nvPr/>
+        </p:nvSpPr>
+        <p:spPr>
+          <a:xfrm>
+            <a:off x="1097280" y="5120640"/>
+            <a:ext cx="10012680" cy="384048"/>
+          </a:xfrm>
+          <a:prstGeom prst="rect">
+            <a:avLst/>
+          </a:prstGeom>
+          <a:noFill/>
+        </p:spPr>
+        <p:txBody>
+          <a:bodyPr wrap="square" lIns="54864" rIns="54864" tIns="18288" bIns="18288">
+            <a:spAutoFit/>
+          </a:bodyPr>
+          <a:lstStyle/>
+          <a:p>
+            <a:pPr algn="l"/>
+            <a:r>
+              <a:rPr sz="1500" b="0">
+                <a:solidFill>
+                  <a:srgbClr val="253446"/>
+                </a:solidFill>
+                <a:latin typeface="Aptos"/>
+              </a:rPr>
+              <a:t>Team output: decision log · evidence preserved · restore checks · decision owners · next status update. Debrief: which controls informed your choices?</a:t>
+            </a:r>
+          </a:p>
+        </p:txBody>
+      </p:sp>
+      <p:sp>
+        <p:nvSpPr>
+          <p:cNvPr id="20" name="TextBox 19"/>
+          <p:cNvSpPr txBox="1"/>
+          <p:nvPr/>
+        </p:nvSpPr>
+        <p:spPr>
+          <a:xfrm>
+            <a:off x="11704320" y="6565392"/>
+            <a:ext cx="411480" cy="182880"/>
+          </a:xfrm>
+          <a:prstGeom prst="rect">
+            <a:avLst/>
+          </a:prstGeom>
+          <a:noFill/>
+        </p:spPr>
+        <p:txBody>
+          <a:bodyPr wrap="square" lIns="54864" rIns="54864" tIns="18288" bIns="18288">
+            <a:spAutoFit/>
+          </a:bodyPr>
+          <a:lstStyle/>
+          <a:p>
+            <a:r>
+              <a:t>61</a:t>
+            </a:r>
+          </a:p>
+        </p:txBody>
+      </p:sp>
+      <p:sp>
+        <p:nvSpPr>
+          <p:cNvPr id="21" name="TextBox 20"/>
+          <p:cNvSpPr txBox="1"/>
+          <p:nvPr/>
+        </p:nvSpPr>
+        <p:spPr>
+          <a:xfrm>
+            <a:off x="594360" y="5907024"/>
+            <a:ext cx="10972800" cy="274320"/>
+          </a:xfrm>
+          <a:prstGeom prst="rect">
+            <a:avLst/>
+          </a:prstGeom>
+          <a:noFill/>
+        </p:spPr>
+        <p:txBody>
+          <a:bodyPr wrap="none" anchor="ctr">
+            <a:spAutoFit/>
+          </a:bodyPr>
+          <a:lstStyle/>
+          <a:p>
+            <a:pPr algn="ctr"/>
+            <a:r>
+              <a:rPr sz="1100" b="1">
+                <a:solidFill>
+                  <a:srgbClr val="245487"/>
+                </a:solidFill>
+                <a:latin typeface="Aptos"/>
+                <a:hlinkClick r:id="rId2"/>
+              </a:rPr>
+              <a:t>Format reference: CISA Cybersecurity Tabletop Exercise Tips ↗</a:t>
             </a:r>
           </a:p>
         </p:txBody>
